--- a/media/resources/files/Onduktar_Akcha_XjanaO_essaRhW.pptx
+++ b/media/resources/files/Onduktar_Akcha_XjanaO_essaRhW.pptx
@@ -12991,7 +12991,7 @@
                 <a:ea typeface="+mn-ea"/>
                 <a:cs typeface="+mn-cs"/>
               </a:rPr>
-              <a:t>Турдуу пикирлер учун ыраазычылык билдиребиз.</a:t>
+              <a:t>Түрдүү пикирлер үчүн ыраазычылык билдиребиз.</a:t>
             </a:r>
           </a:p>
           <a:p>

--- a/media/resources/files/Onduktar_Akcha_XjanaO_essaRhW.pptx
+++ b/media/resources/files/Onduktar_Akcha_XjanaO_essaRhW.pptx
@@ -3915,7 +3915,7 @@
                 <a:ea typeface="+mn-ea"/>
                 <a:cs typeface="Arial" panose="020B0604020202020204" pitchFamily="34" charset="0"/>
               </a:rPr>
-              <a:t>Мугалим үчүн жооп баракчасы жана таратма материалдар камтылган.</a:t>
+              <a:t>Мугалим үчүн жооп барагы жана таратма материалдар бар.</a:t>
             </a:r>
           </a:p>
           <a:p>
@@ -3984,7 +3984,7 @@
                 <a:ea typeface="+mn-ea"/>
                 <a:cs typeface="Arial" panose="020B0604020202020204" pitchFamily="34" charset="0"/>
               </a:rPr>
-              <a:t>Кайсы команда туура жооп бергенине жараша '</a:t>
+              <a:t>Туура жооп берген командага жараша «</a:t>
             </a:r>
             <a:r>
               <a:rPr kumimoji="0" lang="en-GB" sz="2000" b="0" i="0" u="sng" strike="noStrike" kern="1200" cap="none" spc="0" normalizeH="0" baseline="0" noProof="0" dirty="0">
@@ -4001,7 +4001,7 @@
                 <a:ea typeface="+mn-ea"/>
                 <a:cs typeface="Arial" panose="020B0604020202020204" pitchFamily="34" charset="0"/>
               </a:rPr>
-              <a:t>X' </a:t>
+              <a:t>X» </a:t>
             </a:r>
             <a:r>
               <a:rPr kumimoji="0" lang="ru-RU" sz="2000" b="0" i="0" u="sng" strike="noStrike" kern="1200" cap="none" spc="0" normalizeH="0" baseline="0" noProof="0" dirty="0">
@@ -4018,7 +4018,7 @@
                 <a:ea typeface="+mn-ea"/>
                 <a:cs typeface="Arial" panose="020B0604020202020204" pitchFamily="34" charset="0"/>
               </a:rPr>
-              <a:t>же '</a:t>
+              <a:t>же «</a:t>
             </a:r>
             <a:r>
               <a:rPr kumimoji="0" lang="en-GB" sz="2000" b="0" i="0" u="sng" strike="noStrike" kern="1200" cap="none" spc="0" normalizeH="0" baseline="0" noProof="0" dirty="0">
@@ -4035,7 +4035,7 @@
                 <a:ea typeface="+mn-ea"/>
                 <a:cs typeface="Arial" panose="020B0604020202020204" pitchFamily="34" charset="0"/>
               </a:rPr>
-              <a:t>O' </a:t>
+              <a:t>O» </a:t>
             </a:r>
             <a:r>
               <a:rPr kumimoji="0" lang="ru-RU" sz="2000" b="0" i="0" u="sng" strike="noStrike" kern="1200" cap="none" spc="0" normalizeH="0" baseline="0" noProof="0" dirty="0">
@@ -4052,7 +4052,7 @@
                 <a:ea typeface="+mn-ea"/>
                 <a:cs typeface="Arial" panose="020B0604020202020204" pitchFamily="34" charset="0"/>
               </a:rPr>
-              <a:t>баскычын басыңыз/тийип коюңуз</a:t>
+              <a:t>баскычын басыңыз</a:t>
             </a:r>
             <a:r>
               <a:rPr kumimoji="0" lang="en-GB" sz="2000" b="0" i="0" u="none" strike="noStrike" kern="1200" cap="none" spc="0" normalizeH="0" baseline="0" noProof="0" dirty="0">
@@ -4824,7 +4824,7 @@
                   <a:schemeClr val="tx1"/>
                 </a:solidFill>
               </a:rPr>
-              <a:t>£17.50</a:t>
+              <a:t>£17,50</a:t>
             </a:r>
           </a:p>
         </p:txBody>
@@ -5286,7 +5286,7 @@
                   <a:schemeClr val="tx1"/>
                 </a:solidFill>
               </a:rPr>
-              <a:t>£5.95</a:t>
+              <a:t>£5,95</a:t>
             </a:r>
           </a:p>
         </p:txBody>
@@ -5433,7 +5433,7 @@
                   <a:schemeClr val="tx1"/>
                 </a:solidFill>
               </a:rPr>
-              <a:t>£32.50</a:t>
+              <a:t>£32,50</a:t>
             </a:r>
           </a:p>
         </p:txBody>
@@ -5587,7 +5587,7 @@
                   <a:schemeClr val="tx1"/>
                 </a:solidFill>
               </a:rPr>
-              <a:t>£14.96</a:t>
+              <a:t>£14,96</a:t>
             </a:r>
           </a:p>
         </p:txBody>
@@ -5741,7 +5741,7 @@
                   <a:schemeClr val="tx1"/>
                 </a:solidFill>
               </a:rPr>
-              <a:t>£32.40</a:t>
+              <a:t>£32,40</a:t>
             </a:r>
           </a:p>
         </p:txBody>
@@ -5888,7 +5888,7 @@
                   <a:schemeClr val="tx1"/>
                 </a:solidFill>
               </a:rPr>
-              <a:t>£17.99</a:t>
+              <a:t>£17,99</a:t>
             </a:r>
           </a:p>
         </p:txBody>
@@ -6043,7 +6043,7 @@
                   <a:schemeClr val="tx1"/>
                 </a:solidFill>
               </a:rPr>
-              <a:t>£31.50</a:t>
+              <a:t>£31,50</a:t>
             </a:r>
           </a:p>
         </p:txBody>
@@ -6199,7 +6199,7 @@
                   <a:schemeClr val="tx1"/>
                 </a:solidFill>
               </a:rPr>
-              <a:t>£4.60</a:t>
+              <a:t>£4,60</a:t>
             </a:r>
           </a:p>
         </p:txBody>
@@ -6354,7 +6354,7 @@
                   <a:schemeClr val="tx1"/>
                 </a:solidFill>
               </a:rPr>
-              <a:t>£9.99</a:t>
+              <a:t>£9,99</a:t>
             </a:r>
           </a:p>
         </p:txBody>
@@ -9433,7 +9433,7 @@
                   <a:schemeClr val="tx1"/>
                 </a:solidFill>
               </a:rPr>
-              <a:t>£17.50</a:t>
+              <a:t>£17,50</a:t>
             </a:r>
           </a:p>
         </p:txBody>
@@ -9895,7 +9895,7 @@
                   <a:schemeClr val="tx1"/>
                 </a:solidFill>
               </a:rPr>
-              <a:t>£5.95</a:t>
+              <a:t>£5,95</a:t>
             </a:r>
           </a:p>
         </p:txBody>
@@ -10042,7 +10042,7 @@
                   <a:schemeClr val="tx1"/>
                 </a:solidFill>
               </a:rPr>
-              <a:t>£32.50</a:t>
+              <a:t>£32,50</a:t>
             </a:r>
           </a:p>
         </p:txBody>
@@ -10196,7 +10196,7 @@
                   <a:schemeClr val="tx1"/>
                 </a:solidFill>
               </a:rPr>
-              <a:t>£14.96</a:t>
+              <a:t>£14,96</a:t>
             </a:r>
           </a:p>
         </p:txBody>
@@ -10350,7 +10350,7 @@
                   <a:schemeClr val="tx1"/>
                 </a:solidFill>
               </a:rPr>
-              <a:t>£32.40</a:t>
+              <a:t>£32,40</a:t>
             </a:r>
           </a:p>
         </p:txBody>
@@ -10497,7 +10497,7 @@
                   <a:schemeClr val="tx1"/>
                 </a:solidFill>
               </a:rPr>
-              <a:t>£17.99</a:t>
+              <a:t>£17,99</a:t>
             </a:r>
           </a:p>
         </p:txBody>
@@ -10652,7 +10652,7 @@
                   <a:schemeClr val="tx1"/>
                 </a:solidFill>
               </a:rPr>
-              <a:t>£31.50</a:t>
+              <a:t>£31,50</a:t>
             </a:r>
           </a:p>
         </p:txBody>
@@ -10808,7 +10808,7 @@
                   <a:schemeClr val="tx1"/>
                 </a:solidFill>
               </a:rPr>
-              <a:t>£4.60</a:t>
+              <a:t>£4,60</a:t>
             </a:r>
           </a:p>
         </p:txBody>
@@ -10963,7 +10963,7 @@
                   <a:schemeClr val="tx1"/>
                 </a:solidFill>
               </a:rPr>
-              <a:t>£9.99</a:t>
+              <a:t>£9,99</a:t>
             </a:r>
           </a:p>
         </p:txBody>
@@ -11868,7 +11868,7 @@
                   <a:schemeClr val="tx1"/>
                 </a:solidFill>
               </a:rPr>
-              <a:t>.</a:t>
+              <a:t>,</a:t>
             </a:r>
             <a:r>
               <a:rPr lang="ky-KG" sz="2400" dirty="0">
@@ -12192,7 +12192,7 @@
                   <a:schemeClr val="tx1"/>
                 </a:solidFill>
               </a:rPr>
-              <a:t>82.28</a:t>
+              <a:t>82,28</a:t>
             </a:r>
             <a:endParaRPr lang="en-GB" sz="2400" dirty="0">
               <a:solidFill>
@@ -12279,7 +12279,7 @@
                   <a:schemeClr val="tx1"/>
                 </a:solidFill>
               </a:rPr>
-              <a:t>.</a:t>
+              <a:t>,</a:t>
             </a:r>
             <a:r>
               <a:rPr lang="ky-KG" sz="2400" dirty="0">
@@ -12366,7 +12366,7 @@
                   <a:schemeClr val="tx1"/>
                 </a:solidFill>
               </a:rPr>
-              <a:t>32.20</a:t>
+              <a:t>32,20</a:t>
             </a:r>
             <a:endParaRPr lang="en-GB" sz="2400" dirty="0">
               <a:solidFill>
@@ -12524,7 +12524,7 @@
                   <a:schemeClr val="tx1"/>
                 </a:solidFill>
               </a:rPr>
-              <a:t>59.94</a:t>
+              <a:t>59,94</a:t>
             </a:r>
             <a:endParaRPr lang="en-GB" sz="2400" dirty="0">
               <a:solidFill>
